--- a/site/clases/parte-2-deep-learning/140-analisis-de-sentimiento/clase-140-analisis-de-sentimiento-presentacion.pptx
+++ b/site/clases/parte-2-deep-learning/140-analisis-de-sentimiento/clase-140-analisis-de-sentimiento-presentacion.pptx
@@ -3272,7 +3272,7 @@
                 </a:solidFill>
                 <a:latin typeface="Segoe UI"/>
               </a:rPr>
-              <a:t>Parte: 2 — Deep Learning · Fuente: Géron, cap. 16 § Sentiment Analysis.  Duración estimada: 65 min.</a:t>
+              <a:t>Parte: 2 — Deep Learning · Fuente: Géron, cap. 16 § Sentiment Analysis.  Duración estimada: 65 min. · Nivel: Avanzado</a:t>
             </a:r>
           </a:p>
         </p:txBody>
@@ -3581,7 +3581,7 @@
                 </a:solidFill>
                 <a:latin typeface="Segoe UI"/>
               </a:rPr>
-              <a:t>Parte: 2 — Deep Learning · Fuente: Géron, cap. 16 § Sentiment Analysis.  Duración estimada: 65 min.</a:t>
+              <a:t>Parte: 2 — Deep Learning · Fuente: Géron, cap. 16 § Sentiment Analysis.  Duración estimada: 65 min. · Nivel: Avanzado</a:t>
             </a:r>
           </a:p>
         </p:txBody>
@@ -4910,7 +4910,273 @@
                 </a:solidFill>
                 <a:latin typeface="Courier New"/>
               </a:rPr>
-              <a:t># Imports y configuración inicial</a:t>
+              <a:t>import numpy as np</a:t>
+            </a:r>
+          </a:p>
+          <a:p>
+            <a:pPr>
+              <a:defRPr sz="1200" b="0">
+                <a:solidFill>
+                  <a:srgbClr val="F8FAFC"/>
+                </a:solidFill>
+                <a:latin typeface="Courier New"/>
+              </a:defRPr>
+            </a:pPr>
+            <a:r>
+              <a:rPr sz="1200" b="0">
+                <a:solidFill>
+                  <a:srgbClr val="F8FAFC"/>
+                </a:solidFill>
+                <a:latin typeface="Courier New"/>
+              </a:rPr>
+              <a:t>from tensorflow import keras</a:t>
+            </a:r>
+          </a:p>
+          <a:p>
+            <a:pPr>
+              <a:defRPr sz="1200" b="0">
+                <a:solidFill>
+                  <a:srgbClr val="F8FAFC"/>
+                </a:solidFill>
+                <a:latin typeface="Courier New"/>
+              </a:defRPr>
+            </a:pPr>
+            <a:r>
+              <a:rPr sz="1200" b="0">
+                <a:solidFill>
+                  <a:srgbClr val="F8FAFC"/>
+                </a:solidFill>
+                <a:latin typeface="Courier New"/>
+              </a:rPr>
+              <a:t>from tensorflow.keras import layers</a:t>
+            </a:r>
+          </a:p>
+          <a:p>
+            <a:pPr>
+              <a:defRPr sz="1200" b="0">
+                <a:solidFill>
+                  <a:srgbClr val="F8FAFC"/>
+                </a:solidFill>
+                <a:latin typeface="Courier New"/>
+              </a:defRPr>
+            </a:pPr>
+            <a:r>
+              <a:rPr sz="1200" b="0">
+                <a:solidFill>
+                  <a:srgbClr val="F8FAFC"/>
+                </a:solidFill>
+                <a:latin typeface="Courier New"/>
+              </a:rPr>
+              <a:t>keras.utils.set_random_seed(42)</a:t>
+            </a:r>
+          </a:p>
+          <a:p>
+            <a:pPr>
+              <a:defRPr sz="1200" b="0">
+                <a:solidFill>
+                  <a:srgbClr val="F8FAFC"/>
+                </a:solidFill>
+                <a:latin typeface="Courier New"/>
+              </a:defRPr>
+            </a:pPr>
+            <a:r>
+              <a:rPr sz="1200" b="0">
+                <a:solidFill>
+                  <a:srgbClr val="F8FAFC"/>
+                </a:solidFill>
+                <a:latin typeface="Courier New"/>
+              </a:rPr>
+              <a:t># Mini-corpus de juguete; el dataset real es IMDB (25k train / 25k test).</a:t>
+            </a:r>
+          </a:p>
+          <a:p>
+            <a:pPr>
+              <a:defRPr sz="1200" b="0">
+                <a:solidFill>
+                  <a:srgbClr val="F8FAFC"/>
+                </a:solidFill>
+                <a:latin typeface="Courier New"/>
+              </a:defRPr>
+            </a:pPr>
+            <a:r>
+              <a:rPr sz="1200" b="0">
+                <a:solidFill>
+                  <a:srgbClr val="F8FAFC"/>
+                </a:solidFill>
+                <a:latin typeface="Courier New"/>
+              </a:rPr>
+              <a:t>textos = np.array([</a:t>
+            </a:r>
+          </a:p>
+          <a:p>
+            <a:pPr>
+              <a:defRPr sz="1200" b="0">
+                <a:solidFill>
+                  <a:srgbClr val="F8FAFC"/>
+                </a:solidFill>
+                <a:latin typeface="Courier New"/>
+              </a:defRPr>
+            </a:pPr>
+            <a:r>
+              <a:rPr sz="1200" b="0">
+                <a:solidFill>
+                  <a:srgbClr val="F8FAFC"/>
+                </a:solidFill>
+                <a:latin typeface="Courier New"/>
+              </a:rPr>
+              <a:t>    "la pelicula fue excelente y muy entretenida",</a:t>
+            </a:r>
+          </a:p>
+          <a:p>
+            <a:pPr>
+              <a:defRPr sz="1200" b="0">
+                <a:solidFill>
+                  <a:srgbClr val="F8FAFC"/>
+                </a:solidFill>
+                <a:latin typeface="Courier New"/>
+              </a:defRPr>
+            </a:pPr>
+            <a:r>
+              <a:rPr sz="1200" b="0">
+                <a:solidFill>
+                  <a:srgbClr val="F8FAFC"/>
+                </a:solidFill>
+                <a:latin typeface="Courier New"/>
+              </a:rPr>
+              <a:t>    "una obra maestra, actuaciones brillantes",</a:t>
+            </a:r>
+          </a:p>
+          <a:p>
+            <a:pPr>
+              <a:defRPr sz="1200" b="0">
+                <a:solidFill>
+                  <a:srgbClr val="F8FAFC"/>
+                </a:solidFill>
+                <a:latin typeface="Courier New"/>
+              </a:defRPr>
+            </a:pPr>
+            <a:r>
+              <a:rPr sz="1200" b="0">
+                <a:solidFill>
+                  <a:srgbClr val="F8FAFC"/>
+                </a:solidFill>
+                <a:latin typeface="Courier New"/>
+              </a:rPr>
+              <a:t>    "pesima, aburrida y sin sentido alguno",</a:t>
+            </a:r>
+          </a:p>
+          <a:p>
+            <a:pPr>
+              <a:defRPr sz="1200" b="0">
+                <a:solidFill>
+                  <a:srgbClr val="F8FAFC"/>
+                </a:solidFill>
+                <a:latin typeface="Courier New"/>
+              </a:defRPr>
+            </a:pPr>
+            <a:r>
+              <a:rPr sz="1200" b="0">
+                <a:solidFill>
+                  <a:srgbClr val="F8FAFC"/>
+                </a:solidFill>
+                <a:latin typeface="Courier New"/>
+              </a:rPr>
+              <a:t>    "no la recomiendo, perdi mi tiempo",</a:t>
+            </a:r>
+          </a:p>
+          <a:p>
+            <a:pPr>
+              <a:defRPr sz="1200" b="0">
+                <a:solidFill>
+                  <a:srgbClr val="F8FAFC"/>
+                </a:solidFill>
+                <a:latin typeface="Courier New"/>
+              </a:defRPr>
+            </a:pPr>
+            <a:r>
+              <a:rPr sz="1200" b="0">
+                <a:solidFill>
+                  <a:srgbClr val="F8FAFC"/>
+                </a:solidFill>
+                <a:latin typeface="Courier New"/>
+              </a:rPr>
+              <a:t>    "genial, la volveria a ver sin dudarlo",</a:t>
+            </a:r>
+          </a:p>
+          <a:p>
+            <a:pPr>
+              <a:defRPr sz="1200" b="0">
+                <a:solidFill>
+                  <a:srgbClr val="F8FAFC"/>
+                </a:solidFill>
+                <a:latin typeface="Courier New"/>
+              </a:defRPr>
+            </a:pPr>
+            <a:r>
+              <a:rPr sz="1200" b="0">
+                <a:solidFill>
+                  <a:srgbClr val="F8FAFC"/>
+                </a:solidFill>
+                <a:latin typeface="Courier New"/>
+              </a:rPr>
+              <a:t>    "horrible guion y mala direccion",</a:t>
+            </a:r>
+          </a:p>
+          <a:p>
+            <a:pPr>
+              <a:defRPr sz="1200" b="0">
+                <a:solidFill>
+                  <a:srgbClr val="F8FAFC"/>
+                </a:solidFill>
+                <a:latin typeface="Courier New"/>
+              </a:defRPr>
+            </a:pPr>
+            <a:r>
+              <a:rPr sz="1200" b="0">
+                <a:solidFill>
+                  <a:srgbClr val="F8FAFC"/>
+                </a:solidFill>
+                <a:latin typeface="Courier New"/>
+              </a:rPr>
+              <a:t>])</a:t>
+            </a:r>
+          </a:p>
+          <a:p>
+            <a:pPr>
+              <a:defRPr sz="1200" b="0">
+                <a:solidFill>
+                  <a:srgbClr val="F8FAFC"/>
+                </a:solidFill>
+                <a:latin typeface="Courier New"/>
+              </a:defRPr>
+            </a:pPr>
+            <a:r>
+              <a:rPr sz="1200" b="0">
+                <a:solidFill>
+                  <a:srgbClr val="F8FAFC"/>
+                </a:solidFill>
+                <a:latin typeface="Courier New"/>
+              </a:rPr>
+              <a:t>etiquetas = np.array([1, 1, 0, 0, 1, 0], dtype="float32")   # 1 = positivo, 0 = negativo</a:t>
+            </a:r>
+          </a:p>
+          <a:p>
+            <a:pPr>
+              <a:defRPr sz="1200" b="0">
+                <a:solidFill>
+                  <a:srgbClr val="F8FAFC"/>
+                </a:solidFill>
+                <a:latin typeface="Courier New"/>
+              </a:defRPr>
+            </a:pPr>
+            <a:r>
+              <a:rPr sz="1200" b="0">
+                <a:solidFill>
+                  <a:srgbClr val="F8FAFC"/>
+                </a:solidFill>
+                <a:latin typeface="Courier New"/>
+              </a:rPr>
+              <a:t>print("ejemplos:", len(textos))</a:t>
             </a:r>
           </a:p>
         </p:txBody>
